--- a/curso/pptx/S59.pptx
+++ b/curso/pptx/S59.pptx
@@ -7102,7 +7102,7 @@
                 </a:solidFill>
                 <a:latin typeface="Nunito Sans"/>
               </a:rPr>
-              <a:t>Sale un youtuber famoso con bata blanca</a:t>
+              <a:t>一位穿白大褂的著名油管博主出场</a:t>
             </a:r>
           </a:p>
           <a:p>
@@ -7127,7 +7127,7 @@
                 </a:solidFill>
                 <a:latin typeface="Nunito Sans"/>
               </a:rPr>
-              <a:t>«9 de cada 10 estudiantes ya la toman»</a:t>
+              <a:t>“10个学生里有9个已经在喝”</a:t>
             </a:r>
           </a:p>
           <a:p>
@@ -7152,7 +7152,7 @@
                 </a:solidFill>
                 <a:latin typeface="Nunito Sans"/>
               </a:rPr>
-              <a:t>«Solo esta semana: 2x1»</a:t>
+              <a:t>“仅限本周：买一送一”</a:t>
             </a:r>
           </a:p>
           <a:p>
@@ -7177,7 +7177,7 @@
                 </a:solidFill>
                 <a:latin typeface="Nunito Sans"/>
               </a:rPr>
-              <a:t>No aparece #publi</a:t>
+              <a:t>没有出现 #publi</a:t>
             </a:r>
           </a:p>
         </p:txBody>
@@ -7329,7 +7329,7 @@
                 </a:solidFill>
                 <a:latin typeface="Nunito Sans"/>
               </a:rPr>
-              <a:t>¿Qué me piden creer?</a:t>
+              <a:t>他们要我相信什么？</a:t>
             </a:r>
             <a:r>
               <a:rPr sz="2800" b="0">
@@ -7338,7 +7338,7 @@
                 </a:solidFill>
                 <a:latin typeface="Nunito Sans"/>
               </a:rPr>
-              <a:t> (unidades 1 y 2)</a:t>
+              <a:t>（第1、2单元）</a:t>
             </a:r>
           </a:p>
           <a:p>
@@ -7363,7 +7363,7 @@
                 </a:solidFill>
                 <a:latin typeface="Nunito Sans"/>
               </a:rPr>
-              <a:t>¿Qué razones dan? ¿Son buenas?</a:t>
+              <a:t>他们给出了什么理由？这些理由好吗？</a:t>
             </a:r>
             <a:r>
               <a:rPr sz="2800" b="0">
@@ -7372,7 +7372,7 @@
                 </a:solidFill>
                 <a:latin typeface="Nunito Sans"/>
               </a:rPr>
-              <a:t> (unidades 2, 3 y 4)</a:t>
+              <a:t>（第2、3、4单元）</a:t>
             </a:r>
           </a:p>
           <a:p>
@@ -7397,7 +7397,7 @@
                 </a:solidFill>
                 <a:latin typeface="Nunito Sans"/>
               </a:rPr>
-              <a:t>¿Quién lo dice y qué gana?</a:t>
+              <a:t>是谁说的？他能得到什么？</a:t>
             </a:r>
             <a:r>
               <a:rPr sz="2800" b="0">
@@ -7406,7 +7406,7 @@
                 </a:solidFill>
                 <a:latin typeface="Nunito Sans"/>
               </a:rPr>
-              <a:t> (unidades 5 y 6)</a:t>
+              <a:t>（第5、6单元）</a:t>
             </a:r>
           </a:p>
           <a:p>
@@ -7431,7 +7431,7 @@
                 </a:solidFill>
                 <a:latin typeface="Nunito Sans"/>
               </a:rPr>
-              <a:t>¿Los números dicen lo que parece?</a:t>
+              <a:t>数字真的像看起来那样吗？</a:t>
             </a:r>
             <a:r>
               <a:rPr sz="2800" b="0">
@@ -7440,7 +7440,7 @@
                 </a:solidFill>
                 <a:latin typeface="Nunito Sans"/>
               </a:rPr>
-              <a:t> (unidad 7)</a:t>
+              <a:t>（第7单元）</a:t>
             </a:r>
           </a:p>
           <a:p>
@@ -7465,7 +7465,7 @@
                 </a:solidFill>
                 <a:latin typeface="Nunito Sans"/>
               </a:rPr>
-              <a:t>¿Qué trucos y sesgos usan?</a:t>
+              <a:t>他们用了什么把戏和偏见？</a:t>
             </a:r>
             <a:r>
               <a:rPr sz="2800" b="0">
@@ -7474,7 +7474,7 @@
                 </a:solidFill>
                 <a:latin typeface="Nunito Sans"/>
               </a:rPr>
-              <a:t> (unidades 8 y 9)</a:t>
+              <a:t>（第8、9单元）</a:t>
             </a:r>
           </a:p>
         </p:txBody>
